--- a/CoworkPlaybook/Cowork_教育訓練簡報_公部門版.pptx
+++ b/CoworkPlaybook/Cowork_教育訓練簡報_公部門版.pptx
@@ -18778,7 +18778,7 @@
                 <a:ea typeface="Microsoft JhengHei" pitchFamily="34" charset="-122"/>
                 <a:cs typeface="Microsoft JhengHei" pitchFamily="34" charset="-120"/>
               </a:rPr>
-              <a:t>不能存取本機檔案、刪除 OneDrive/SharePoint 檔案或讀取加密檔；附件 &lt;200MB，自訂技能未驗證需審閱。</a:t>
+              <a:t>不能存取本機檔案、刪除 OneDrive/SharePoint 檔案或讀取加密檔；附件 &lt;200MB；自訂技能與第三方 plugin 未經 Microsoft 驗證，需自行審閱。官方明列不適用於「免人工審查即需保證正確」的用途。</a:t>
             </a:r>
             <a:endParaRPr lang="en-US" sz="1300" dirty="0"/>
           </a:p>
@@ -18973,7 +18973,7 @@
                 <a:ea typeface="Microsoft JhengHei" pitchFamily="34" charset="-122"/>
                 <a:cs typeface="Microsoft JhengHei" pitchFamily="34" charset="-120"/>
               </a:rPr>
-              <a:t>開始前請確認：M365 Copilot 授權、已啟用用量計費（Cowork 現已正式開放）、租戶已啟用 Anthropic 子處理者；可在 Web/桌面/行動/Outlook/Teams 使用（本機瀏覽器工作僅限網頁版＋最新版 Edge）。</a:t>
+              <a:t>開始前請確認：每位使用者一張 M365 Copilot 授權、管理員已啟用用量計費（Copilot Credits，未啟用則無法存取）、租戶位於 Anthropic 支援地區；可在 Web/桌面/行動/Outlook/Teams 使用（本機瀏覽器工作僅限網頁版＋Edge 150 以上，且預設停用需管理員開啟）。</a:t>
             </a:r>
             <a:endParaRPr lang="en-US" sz="1500" dirty="0"/>
           </a:p>
@@ -19304,7 +19304,7 @@
                 <a:ea typeface="Microsoft JhengHei" pitchFamily="34" charset="-122"/>
                 <a:cs typeface="Microsoft JhengHei" pitchFamily="34" charset="-120"/>
               </a:rPr>
-              <a:t>模型選擇器支援 Auto、Claude Opus/Sonnet、Sonnet+Opus 顧問配對、Fable 5 preview、GPT 5.5</a:t>
+              <a:t>模型選擇器：Auto（預設）、GPT 5.5 Frontier、GPT 5.6 Sol／Terra、Opus 5、Sonnet 5、Fable 5（預覽・預設關閉）</a:t>
             </a:r>
             <a:endParaRPr lang="en-US" sz="1400" dirty="0"/>
           </a:p>
@@ -19367,7 +19367,7 @@
                 <a:ea typeface="Microsoft JhengHei" pitchFamily="34" charset="-122"/>
                 <a:cs typeface="Microsoft JhengHei" pitchFamily="34" charset="-120"/>
               </a:rPr>
-              <a:t>想要自動觸發？到「排程」頁設定事件驅動任務（收到指定信件／被 @提及時自動執行）</a:t>
+              <a:t>想要自動觸發？到「Automations」頁設定排程提示（上限 5 個）或事件觸發任務（收信／被 @提及）</a:t>
             </a:r>
             <a:endParaRPr lang="en-US" sz="1400" dirty="0"/>
           </a:p>
@@ -20480,8 +20480,8 @@
         </p:nvSpPr>
         <p:spPr>
           <a:xfrm>
-            <a:off x="640080" y="1828800"/>
-            <a:ext cx="2743200" cy="786384"/>
+            <a:off x="640080" y="1737360"/>
+            <a:ext cx="2743200" cy="457200"/>
           </a:xfrm>
           <a:prstGeom prst="rect">
             <a:avLst/>
@@ -20500,8 +20500,8 @@
         </p:nvSpPr>
         <p:spPr>
           <a:xfrm>
-            <a:off x="3383280" y="1828800"/>
-            <a:ext cx="4023360" cy="786384"/>
+            <a:off x="3383280" y="1737360"/>
+            <a:ext cx="4023360" cy="457200"/>
           </a:xfrm>
           <a:prstGeom prst="rect">
             <a:avLst/>
@@ -20520,8 +20520,8 @@
         </p:nvSpPr>
         <p:spPr>
           <a:xfrm>
-            <a:off x="7406640" y="1828800"/>
-            <a:ext cx="4142232" cy="786384"/>
+            <a:off x="7406640" y="1737360"/>
+            <a:ext cx="4142232" cy="457200"/>
           </a:xfrm>
           <a:prstGeom prst="rect">
             <a:avLst/>
@@ -20540,8 +20540,8 @@
         </p:nvSpPr>
         <p:spPr>
           <a:xfrm>
-            <a:off x="640080" y="1828800"/>
-            <a:ext cx="2743200" cy="786384"/>
+            <a:off x="640080" y="1737360"/>
+            <a:ext cx="2743200" cy="457200"/>
           </a:xfrm>
           <a:prstGeom prst="rect">
             <a:avLst/>
@@ -20568,8 +20568,8 @@
         </p:nvSpPr>
         <p:spPr>
           <a:xfrm>
-            <a:off x="3383280" y="1828800"/>
-            <a:ext cx="4023360" cy="786384"/>
+            <a:off x="3383280" y="1737360"/>
+            <a:ext cx="4023360" cy="457200"/>
           </a:xfrm>
           <a:prstGeom prst="rect">
             <a:avLst/>
@@ -20585,7 +20585,7 @@
               <a:buNone/>
             </a:pPr>
             <a:r>
-              <a:rPr lang="en-US" sz="1500" b="1" dirty="0">
+              <a:rPr lang="en-US" sz="1400" b="1" dirty="0">
                 <a:solidFill>
                   <a:srgbClr val="FFFFFF"/>
                 </a:solidFill>
@@ -20595,7 +20595,7 @@
               </a:rPr>
               <a:t>一般 Copilot Chat</a:t>
             </a:r>
-            <a:endParaRPr lang="en-US" sz="1500" dirty="0"/>
+            <a:endParaRPr lang="en-US" sz="1400" dirty="0"/>
           </a:p>
         </p:txBody>
       </p:sp>
@@ -20607,8 +20607,8 @@
         </p:nvSpPr>
         <p:spPr>
           <a:xfrm>
-            <a:off x="7406640" y="1828800"/>
-            <a:ext cx="4142232" cy="786384"/>
+            <a:off x="7406640" y="1737360"/>
+            <a:ext cx="4142232" cy="457200"/>
           </a:xfrm>
           <a:prstGeom prst="rect">
             <a:avLst/>
@@ -20624,7 +20624,7 @@
               <a:buNone/>
             </a:pPr>
             <a:r>
-              <a:rPr lang="en-US" sz="1500" b="1" dirty="0">
+              <a:rPr lang="en-US" sz="1400" b="1" dirty="0">
                 <a:solidFill>
                   <a:srgbClr val="FFFFFF"/>
                 </a:solidFill>
@@ -20634,7 +20634,7 @@
               </a:rPr>
               <a:t>Copilot Cowork</a:t>
             </a:r>
-            <a:endParaRPr lang="en-US" sz="1500" dirty="0"/>
+            <a:endParaRPr lang="en-US" sz="1400" dirty="0"/>
           </a:p>
         </p:txBody>
       </p:sp>
@@ -20646,8 +20646,8 @@
         </p:nvSpPr>
         <p:spPr>
           <a:xfrm>
-            <a:off x="640080" y="2615184"/>
-            <a:ext cx="10908792" cy="786384"/>
+            <a:off x="640080" y="2194560"/>
+            <a:ext cx="10908792" cy="457200"/>
           </a:xfrm>
           <a:prstGeom prst="rect">
             <a:avLst/>
@@ -20666,8 +20666,8 @@
         </p:nvSpPr>
         <p:spPr>
           <a:xfrm>
-            <a:off x="822960" y="2615184"/>
-            <a:ext cx="2468880" cy="786384"/>
+            <a:off x="822960" y="2194560"/>
+            <a:ext cx="2468880" cy="457200"/>
           </a:xfrm>
           <a:prstGeom prst="rect">
             <a:avLst/>
@@ -20683,7 +20683,7 @@
               <a:buNone/>
             </a:pPr>
             <a:r>
-              <a:rPr lang="en-US" sz="1400" b="1" dirty="0">
+              <a:rPr lang="en-US" sz="1250" b="1" dirty="0">
                 <a:solidFill>
                   <a:srgbClr val="1E2235"/>
                 </a:solidFill>
@@ -20693,7 +20693,7 @@
               </a:rPr>
               <a:t>互動方式</a:t>
             </a:r>
-            <a:endParaRPr lang="en-US" sz="1400" dirty="0"/>
+            <a:endParaRPr lang="en-US" sz="1250" dirty="0"/>
           </a:p>
         </p:txBody>
       </p:sp>
@@ -20705,8 +20705,8 @@
         </p:nvSpPr>
         <p:spPr>
           <a:xfrm>
-            <a:off x="3566160" y="2615184"/>
-            <a:ext cx="3657600" cy="786384"/>
+            <a:off x="3566160" y="2194560"/>
+            <a:ext cx="3657600" cy="457200"/>
           </a:xfrm>
           <a:prstGeom prst="rect">
             <a:avLst/>
@@ -20722,7 +20722,7 @@
               <a:buNone/>
             </a:pPr>
             <a:r>
-              <a:rPr lang="en-US" sz="1400" dirty="0">
+              <a:rPr lang="en-US" sz="1250" dirty="0">
                 <a:solidFill>
                   <a:srgbClr val="5B6079"/>
                 </a:solidFill>
@@ -20732,7 +20732,7 @@
               </a:rPr>
               <a:t>快速單輪問答</a:t>
             </a:r>
-            <a:endParaRPr lang="en-US" sz="1400" dirty="0"/>
+            <a:endParaRPr lang="en-US" sz="1250" dirty="0"/>
           </a:p>
         </p:txBody>
       </p:sp>
@@ -20744,8 +20744,8 @@
         </p:nvSpPr>
         <p:spPr>
           <a:xfrm>
-            <a:off x="7589520" y="2615184"/>
-            <a:ext cx="3776472" cy="786384"/>
+            <a:off x="7589520" y="2194560"/>
+            <a:ext cx="3776472" cy="457200"/>
           </a:xfrm>
           <a:prstGeom prst="rect">
             <a:avLst/>
@@ -20761,7 +20761,7 @@
               <a:buNone/>
             </a:pPr>
             <a:r>
-              <a:rPr lang="en-US" sz="1400" dirty="0">
+              <a:rPr lang="en-US" sz="1250" dirty="0">
                 <a:solidFill>
                   <a:srgbClr val="1E2235"/>
                 </a:solidFill>
@@ -20771,7 +20771,7 @@
               </a:rPr>
               <a:t>交付目標，跨 App 自主多步執行</a:t>
             </a:r>
-            <a:endParaRPr lang="en-US" sz="1400" dirty="0"/>
+            <a:endParaRPr lang="en-US" sz="1250" dirty="0"/>
           </a:p>
         </p:txBody>
       </p:sp>
@@ -20783,8 +20783,8 @@
         </p:nvSpPr>
         <p:spPr>
           <a:xfrm>
-            <a:off x="640080" y="3401568"/>
-            <a:ext cx="10908792" cy="786384"/>
+            <a:off x="640080" y="2651760"/>
+            <a:ext cx="10908792" cy="457200"/>
           </a:xfrm>
           <a:prstGeom prst="rect">
             <a:avLst/>
@@ -20803,8 +20803,8 @@
         </p:nvSpPr>
         <p:spPr>
           <a:xfrm>
-            <a:off x="822960" y="3401568"/>
-            <a:ext cx="2468880" cy="786384"/>
+            <a:off x="822960" y="2651760"/>
+            <a:ext cx="2468880" cy="457200"/>
           </a:xfrm>
           <a:prstGeom prst="rect">
             <a:avLst/>
@@ -20820,7 +20820,7 @@
               <a:buNone/>
             </a:pPr>
             <a:r>
-              <a:rPr lang="en-US" sz="1400" b="1" dirty="0">
+              <a:rPr lang="en-US" sz="1250" b="1" dirty="0">
                 <a:solidFill>
                   <a:srgbClr val="1E2235"/>
                 </a:solidFill>
@@ -20828,9 +20828,9 @@
                 <a:ea typeface="Microsoft JhengHei" pitchFamily="34" charset="-122"/>
                 <a:cs typeface="Microsoft JhengHei" pitchFamily="34" charset="-120"/>
               </a:rPr>
-              <a:t>檔案處理</a:t>
-            </a:r>
-            <a:endParaRPr lang="en-US" sz="1400" dirty="0"/>
+              <a:t>速度</a:t>
+            </a:r>
+            <a:endParaRPr lang="en-US" sz="1250" dirty="0"/>
           </a:p>
         </p:txBody>
       </p:sp>
@@ -20842,8 +20842,8 @@
         </p:nvSpPr>
         <p:spPr>
           <a:xfrm>
-            <a:off x="3566160" y="3401568"/>
-            <a:ext cx="3657600" cy="786384"/>
+            <a:off x="3566160" y="2651760"/>
+            <a:ext cx="3657600" cy="457200"/>
           </a:xfrm>
           <a:prstGeom prst="rect">
             <a:avLst/>
@@ -20859,7 +20859,7 @@
               <a:buNone/>
             </a:pPr>
             <a:r>
-              <a:rPr lang="en-US" sz="1400" dirty="0">
+              <a:rPr lang="en-US" sz="1250" dirty="0">
                 <a:solidFill>
                   <a:srgbClr val="5B6079"/>
                 </a:solidFill>
@@ -20867,9 +20867,9 @@
                 <a:ea typeface="Microsoft JhengHei" pitchFamily="34" charset="-122"/>
                 <a:cs typeface="Microsoft JhengHei" pitchFamily="34" charset="-120"/>
               </a:rPr>
-              <a:t>貼上片段內容</a:t>
-            </a:r>
-            <a:endParaRPr lang="en-US" sz="1400" dirty="0"/>
+              <a:t>秒～分鐘</a:t>
+            </a:r>
+            <a:endParaRPr lang="en-US" sz="1250" dirty="0"/>
           </a:p>
         </p:txBody>
       </p:sp>
@@ -20881,8 +20881,8 @@
         </p:nvSpPr>
         <p:spPr>
           <a:xfrm>
-            <a:off x="7589520" y="3401568"/>
-            <a:ext cx="3776472" cy="786384"/>
+            <a:off x="7589520" y="2651760"/>
+            <a:ext cx="3776472" cy="457200"/>
           </a:xfrm>
           <a:prstGeom prst="rect">
             <a:avLst/>
@@ -20898,7 +20898,7 @@
               <a:buNone/>
             </a:pPr>
             <a:r>
-              <a:rPr lang="en-US" sz="1400" dirty="0">
+              <a:rPr lang="en-US" sz="1250" dirty="0">
                 <a:solidFill>
                   <a:srgbClr val="1E2235"/>
                 </a:solidFill>
@@ -20906,9 +20906,9 @@
                 <a:ea typeface="Microsoft JhengHei" pitchFamily="34" charset="-122"/>
                 <a:cs typeface="Microsoft JhengHei" pitchFamily="34" charset="-120"/>
               </a:rPr>
-              <a:t>讀取雲端附件、產出新檔案；不存取本機檔案</a:t>
-            </a:r>
-            <a:endParaRPr lang="en-US" sz="1400" dirty="0"/>
+              <a:t>分鐘～數小時（自主執行）</a:t>
+            </a:r>
+            <a:endParaRPr lang="en-US" sz="1250" dirty="0"/>
           </a:p>
         </p:txBody>
       </p:sp>
@@ -20920,8 +20920,8 @@
         </p:nvSpPr>
         <p:spPr>
           <a:xfrm>
-            <a:off x="640080" y="4187952"/>
-            <a:ext cx="10908792" cy="786384"/>
+            <a:off x="640080" y="3108960"/>
+            <a:ext cx="10908792" cy="457200"/>
           </a:xfrm>
           <a:prstGeom prst="rect">
             <a:avLst/>
@@ -20940,8 +20940,8 @@
         </p:nvSpPr>
         <p:spPr>
           <a:xfrm>
-            <a:off x="822960" y="4187952"/>
-            <a:ext cx="2468880" cy="786384"/>
+            <a:off x="822960" y="3108960"/>
+            <a:ext cx="2468880" cy="457200"/>
           </a:xfrm>
           <a:prstGeom prst="rect">
             <a:avLst/>
@@ -20957,7 +20957,7 @@
               <a:buNone/>
             </a:pPr>
             <a:r>
-              <a:rPr lang="en-US" sz="1400" b="1" dirty="0">
+              <a:rPr lang="en-US" sz="1250" b="1" dirty="0">
                 <a:solidFill>
                   <a:srgbClr val="1E2235"/>
                 </a:solidFill>
@@ -20965,9 +20965,9 @@
                 <a:ea typeface="Microsoft JhengHei" pitchFamily="34" charset="-122"/>
                 <a:cs typeface="Microsoft JhengHei" pitchFamily="34" charset="-120"/>
               </a:rPr>
-              <a:t>技能運用</a:t>
-            </a:r>
-            <a:endParaRPr lang="en-US" sz="1400" dirty="0"/>
+              <a:t>任務複雜度</a:t>
+            </a:r>
+            <a:endParaRPr lang="en-US" sz="1250" dirty="0"/>
           </a:p>
         </p:txBody>
       </p:sp>
@@ -20979,8 +20979,8 @@
         </p:nvSpPr>
         <p:spPr>
           <a:xfrm>
-            <a:off x="3566160" y="4187952"/>
-            <a:ext cx="3657600" cy="786384"/>
+            <a:off x="3566160" y="3108960"/>
+            <a:ext cx="3657600" cy="457200"/>
           </a:xfrm>
           <a:prstGeom prst="rect">
             <a:avLst/>
@@ -20996,7 +20996,7 @@
               <a:buNone/>
             </a:pPr>
             <a:r>
-              <a:rPr lang="en-US" sz="1400" dirty="0">
+              <a:rPr lang="en-US" sz="1250" dirty="0">
                 <a:solidFill>
                   <a:srgbClr val="5B6079"/>
                 </a:solidFill>
@@ -21004,9 +21004,9 @@
                 <a:ea typeface="Microsoft JhengHei" pitchFamily="34" charset="-122"/>
                 <a:cs typeface="Microsoft JhengHei" pitchFamily="34" charset="-120"/>
               </a:rPr>
-              <a:t>單一對話能力</a:t>
-            </a:r>
-            <a:endParaRPr lang="en-US" sz="1400" dirty="0"/>
+              <a:t>單步驟、單一工作階段</a:t>
+            </a:r>
+            <a:endParaRPr lang="en-US" sz="1250" dirty="0"/>
           </a:p>
         </p:txBody>
       </p:sp>
@@ -21018,8 +21018,8 @@
         </p:nvSpPr>
         <p:spPr>
           <a:xfrm>
-            <a:off x="7589520" y="4187952"/>
-            <a:ext cx="3776472" cy="786384"/>
+            <a:off x="7589520" y="3108960"/>
+            <a:ext cx="3776472" cy="457200"/>
           </a:xfrm>
           <a:prstGeom prst="rect">
             <a:avLst/>
@@ -21035,7 +21035,7 @@
               <a:buNone/>
             </a:pPr>
             <a:r>
-              <a:rPr lang="en-US" sz="1400" dirty="0">
+              <a:rPr lang="en-US" sz="1250" dirty="0">
                 <a:solidFill>
                   <a:srgbClr val="1E2235"/>
                 </a:solidFill>
@@ -21043,9 +21043,9 @@
                 <a:ea typeface="Microsoft JhengHei" pitchFamily="34" charset="-122"/>
                 <a:cs typeface="Microsoft JhengHei" pitchFamily="34" charset="-120"/>
               </a:rPr>
-              <a:t>自動載入 13 個內建技能與自訂技能</a:t>
-            </a:r>
-            <a:endParaRPr lang="en-US" sz="1400" dirty="0"/>
+              <a:t>跨任務與來源的多步驟工作流</a:t>
+            </a:r>
+            <a:endParaRPr lang="en-US" sz="1250" dirty="0"/>
           </a:p>
         </p:txBody>
       </p:sp>
@@ -21057,8 +21057,8 @@
         </p:nvSpPr>
         <p:spPr>
           <a:xfrm>
-            <a:off x="640080" y="4974336"/>
-            <a:ext cx="10908792" cy="786384"/>
+            <a:off x="640080" y="3566160"/>
+            <a:ext cx="10908792" cy="457200"/>
           </a:xfrm>
           <a:prstGeom prst="rect">
             <a:avLst/>
@@ -21077,8 +21077,8 @@
         </p:nvSpPr>
         <p:spPr>
           <a:xfrm>
-            <a:off x="822960" y="4974336"/>
-            <a:ext cx="2468880" cy="786384"/>
+            <a:off x="822960" y="3566160"/>
+            <a:ext cx="2468880" cy="457200"/>
           </a:xfrm>
           <a:prstGeom prst="rect">
             <a:avLst/>
@@ -21094,7 +21094,7 @@
               <a:buNone/>
             </a:pPr>
             <a:r>
-              <a:rPr lang="en-US" sz="1400" b="1" dirty="0">
+              <a:rPr lang="en-US" sz="1250" b="1" dirty="0">
                 <a:solidFill>
                   <a:srgbClr val="1E2235"/>
                 </a:solidFill>
@@ -21102,9 +21102,9 @@
                 <a:ea typeface="Microsoft JhengHei" pitchFamily="34" charset="-122"/>
                 <a:cs typeface="Microsoft JhengHei" pitchFamily="34" charset="-120"/>
               </a:rPr>
-              <a:t>產出</a:t>
-            </a:r>
-            <a:endParaRPr lang="en-US" sz="1400" dirty="0"/>
+              <a:t>檔案處理</a:t>
+            </a:r>
+            <a:endParaRPr lang="en-US" sz="1250" dirty="0"/>
           </a:p>
         </p:txBody>
       </p:sp>
@@ -21116,8 +21116,8 @@
         </p:nvSpPr>
         <p:spPr>
           <a:xfrm>
-            <a:off x="3566160" y="4974336"/>
-            <a:ext cx="3657600" cy="786384"/>
+            <a:off x="3566160" y="3566160"/>
+            <a:ext cx="3657600" cy="457200"/>
           </a:xfrm>
           <a:prstGeom prst="rect">
             <a:avLst/>
@@ -21133,7 +21133,7 @@
               <a:buNone/>
             </a:pPr>
             <a:r>
-              <a:rPr lang="en-US" sz="1400" dirty="0">
+              <a:rPr lang="en-US" sz="1250" dirty="0">
                 <a:solidFill>
                   <a:srgbClr val="5B6079"/>
                 </a:solidFill>
@@ -21141,9 +21141,9 @@
                 <a:ea typeface="Microsoft JhengHei" pitchFamily="34" charset="-122"/>
                 <a:cs typeface="Microsoft JhengHei" pitchFamily="34" charset="-120"/>
               </a:rPr>
-              <a:t>聊天視窗的文字</a:t>
-            </a:r>
-            <a:endParaRPr lang="en-US" sz="1400" dirty="0"/>
+              <a:t>貼上片段內容</a:t>
+            </a:r>
+            <a:endParaRPr lang="en-US" sz="1250" dirty="0"/>
           </a:p>
         </p:txBody>
       </p:sp>
@@ -21155,8 +21155,8 @@
         </p:nvSpPr>
         <p:spPr>
           <a:xfrm>
-            <a:off x="7589520" y="4974336"/>
-            <a:ext cx="3776472" cy="786384"/>
+            <a:off x="7589520" y="3566160"/>
+            <a:ext cx="3776472" cy="457200"/>
           </a:xfrm>
           <a:prstGeom prst="rect">
             <a:avLst/>
@@ -21172,7 +21172,7 @@
               <a:buNone/>
             </a:pPr>
             <a:r>
-              <a:rPr lang="en-US" sz="1400" dirty="0">
+              <a:rPr lang="en-US" sz="1250" dirty="0">
                 <a:solidFill>
                   <a:srgbClr val="1E2235"/>
                 </a:solidFill>
@@ -21180,9 +21180,9 @@
                 <a:ea typeface="Microsoft JhengHei" pitchFamily="34" charset="-122"/>
                 <a:cs typeface="Microsoft JhengHei" pitchFamily="34" charset="-120"/>
               </a:rPr>
-              <a:t>OneDrive 中真實的文件、試算表、簡報</a:t>
-            </a:r>
-            <a:endParaRPr lang="en-US" sz="1400" dirty="0"/>
+              <a:t>讀取雲端附件、產出新檔案；不存取本機檔案</a:t>
+            </a:r>
+            <a:endParaRPr lang="en-US" sz="1250" dirty="0"/>
           </a:p>
         </p:txBody>
       </p:sp>
@@ -21194,8 +21194,8 @@
         </p:nvSpPr>
         <p:spPr>
           <a:xfrm>
-            <a:off x="640080" y="5760720"/>
-            <a:ext cx="10908792" cy="786384"/>
+            <a:off x="640080" y="4023360"/>
+            <a:ext cx="10908792" cy="457200"/>
           </a:xfrm>
           <a:prstGeom prst="rect">
             <a:avLst/>
@@ -21214,8 +21214,8 @@
         </p:nvSpPr>
         <p:spPr>
           <a:xfrm>
-            <a:off x="822960" y="5760720"/>
-            <a:ext cx="2468880" cy="786384"/>
+            <a:off x="822960" y="4023360"/>
+            <a:ext cx="2468880" cy="457200"/>
           </a:xfrm>
           <a:prstGeom prst="rect">
             <a:avLst/>
@@ -21231,7 +21231,7 @@
               <a:buNone/>
             </a:pPr>
             <a:r>
-              <a:rPr lang="en-US" sz="1400" b="1" dirty="0">
+              <a:rPr lang="en-US" sz="1250" b="1" dirty="0">
                 <a:solidFill>
                   <a:srgbClr val="1E2235"/>
                 </a:solidFill>
@@ -21239,22 +21239,570 @@
                 <a:ea typeface="Microsoft JhengHei" pitchFamily="34" charset="-122"/>
                 <a:cs typeface="Microsoft JhengHei" pitchFamily="34" charset="-120"/>
               </a:rPr>
+              <a:t>技能運用</a:t>
+            </a:r>
+            <a:endParaRPr lang="en-US" sz="1250" dirty="0"/>
+          </a:p>
+        </p:txBody>
+      </p:sp>
+      <p:sp>
+        <p:nvSpPr>
+          <p:cNvPr id="29" name="Text 27"/>
+          <p:cNvSpPr/>
+          <p:nvPr/>
+        </p:nvSpPr>
+        <p:spPr>
+          <a:xfrm>
+            <a:off x="3566160" y="4023360"/>
+            <a:ext cx="3657600" cy="457200"/>
+          </a:xfrm>
+          <a:prstGeom prst="rect">
+            <a:avLst/>
+          </a:prstGeom>
+          <a:noFill/>
+          <a:ln/>
+        </p:spPr>
+        <p:txBody>
+          <a:bodyPr wrap="square" rtlCol="0" anchor="ctr"/>
+          <a:lstStyle/>
+          <a:p>
+            <a:pPr indent="0" marL="0">
+              <a:buNone/>
+            </a:pPr>
+            <a:r>
+              <a:rPr lang="en-US" sz="1250" dirty="0">
+                <a:solidFill>
+                  <a:srgbClr val="5B6079"/>
+                </a:solidFill>
+                <a:latin typeface="Microsoft JhengHei" pitchFamily="34" charset="0"/>
+                <a:ea typeface="Microsoft JhengHei" pitchFamily="34" charset="-122"/>
+                <a:cs typeface="Microsoft JhengHei" pitchFamily="34" charset="-120"/>
+              </a:rPr>
+              <a:t>單一對話能力</a:t>
+            </a:r>
+            <a:endParaRPr lang="en-US" sz="1250" dirty="0"/>
+          </a:p>
+        </p:txBody>
+      </p:sp>
+      <p:sp>
+        <p:nvSpPr>
+          <p:cNvPr id="30" name="Text 28"/>
+          <p:cNvSpPr/>
+          <p:nvPr/>
+        </p:nvSpPr>
+        <p:spPr>
+          <a:xfrm>
+            <a:off x="7589520" y="4023360"/>
+            <a:ext cx="3776472" cy="457200"/>
+          </a:xfrm>
+          <a:prstGeom prst="rect">
+            <a:avLst/>
+          </a:prstGeom>
+          <a:noFill/>
+          <a:ln/>
+        </p:spPr>
+        <p:txBody>
+          <a:bodyPr wrap="square" rtlCol="0" anchor="ctr"/>
+          <a:lstStyle/>
+          <a:p>
+            <a:pPr indent="0" marL="0">
+              <a:buNone/>
+            </a:pPr>
+            <a:r>
+              <a:rPr lang="en-US" sz="1250" dirty="0">
+                <a:solidFill>
+                  <a:srgbClr val="1E2235"/>
+                </a:solidFill>
+                <a:latin typeface="Microsoft JhengHei" pitchFamily="34" charset="0"/>
+                <a:ea typeface="Microsoft JhengHei" pitchFamily="34" charset="-122"/>
+                <a:cs typeface="Microsoft JhengHei" pitchFamily="34" charset="-120"/>
+              </a:rPr>
+              <a:t>自動載入 13 個內建技能與自訂技能</a:t>
+            </a:r>
+            <a:endParaRPr lang="en-US" sz="1250" dirty="0"/>
+          </a:p>
+        </p:txBody>
+      </p:sp>
+      <p:sp>
+        <p:nvSpPr>
+          <p:cNvPr id="31" name="Shape 29"/>
+          <p:cNvSpPr/>
+          <p:nvPr/>
+        </p:nvSpPr>
+        <p:spPr>
+          <a:xfrm>
+            <a:off x="640080" y="4480560"/>
+            <a:ext cx="10908792" cy="457200"/>
+          </a:xfrm>
+          <a:prstGeom prst="rect">
+            <a:avLst/>
+          </a:prstGeom>
+          <a:solidFill>
+            <a:srgbClr val="FFFFFF"/>
+          </a:solidFill>
+          <a:ln/>
+        </p:spPr>
+      </p:sp>
+      <p:sp>
+        <p:nvSpPr>
+          <p:cNvPr id="32" name="Text 30"/>
+          <p:cNvSpPr/>
+          <p:nvPr/>
+        </p:nvSpPr>
+        <p:spPr>
+          <a:xfrm>
+            <a:off x="822960" y="4480560"/>
+            <a:ext cx="2468880" cy="457200"/>
+          </a:xfrm>
+          <a:prstGeom prst="rect">
+            <a:avLst/>
+          </a:prstGeom>
+          <a:noFill/>
+          <a:ln/>
+        </p:spPr>
+        <p:txBody>
+          <a:bodyPr wrap="square" rtlCol="0" anchor="ctr"/>
+          <a:lstStyle/>
+          <a:p>
+            <a:pPr indent="0" marL="0">
+              <a:buNone/>
+            </a:pPr>
+            <a:r>
+              <a:rPr lang="en-US" sz="1250" b="1" dirty="0">
+                <a:solidFill>
+                  <a:srgbClr val="1E2235"/>
+                </a:solidFill>
+                <a:latin typeface="Microsoft JhengHei" pitchFamily="34" charset="0"/>
+                <a:ea typeface="Microsoft JhengHei" pitchFamily="34" charset="-122"/>
+                <a:cs typeface="Microsoft JhengHei" pitchFamily="34" charset="-120"/>
+              </a:rPr>
+              <a:t>產出</a:t>
+            </a:r>
+            <a:endParaRPr lang="en-US" sz="1250" dirty="0"/>
+          </a:p>
+        </p:txBody>
+      </p:sp>
+      <p:sp>
+        <p:nvSpPr>
+          <p:cNvPr id="33" name="Text 31"/>
+          <p:cNvSpPr/>
+          <p:nvPr/>
+        </p:nvSpPr>
+        <p:spPr>
+          <a:xfrm>
+            <a:off x="3566160" y="4480560"/>
+            <a:ext cx="3657600" cy="457200"/>
+          </a:xfrm>
+          <a:prstGeom prst="rect">
+            <a:avLst/>
+          </a:prstGeom>
+          <a:noFill/>
+          <a:ln/>
+        </p:spPr>
+        <p:txBody>
+          <a:bodyPr wrap="square" rtlCol="0" anchor="ctr"/>
+          <a:lstStyle/>
+          <a:p>
+            <a:pPr indent="0" marL="0">
+              <a:buNone/>
+            </a:pPr>
+            <a:r>
+              <a:rPr lang="en-US" sz="1250" dirty="0">
+                <a:solidFill>
+                  <a:srgbClr val="5B6079"/>
+                </a:solidFill>
+                <a:latin typeface="Microsoft JhengHei" pitchFamily="34" charset="0"/>
+                <a:ea typeface="Microsoft JhengHei" pitchFamily="34" charset="-122"/>
+                <a:cs typeface="Microsoft JhengHei" pitchFamily="34" charset="-120"/>
+              </a:rPr>
+              <a:t>聊天視窗的文字</a:t>
+            </a:r>
+            <a:endParaRPr lang="en-US" sz="1250" dirty="0"/>
+          </a:p>
+        </p:txBody>
+      </p:sp>
+      <p:sp>
+        <p:nvSpPr>
+          <p:cNvPr id="34" name="Text 32"/>
+          <p:cNvSpPr/>
+          <p:nvPr/>
+        </p:nvSpPr>
+        <p:spPr>
+          <a:xfrm>
+            <a:off x="7589520" y="4480560"/>
+            <a:ext cx="3776472" cy="457200"/>
+          </a:xfrm>
+          <a:prstGeom prst="rect">
+            <a:avLst/>
+          </a:prstGeom>
+          <a:noFill/>
+          <a:ln/>
+        </p:spPr>
+        <p:txBody>
+          <a:bodyPr wrap="square" rtlCol="0" anchor="ctr"/>
+          <a:lstStyle/>
+          <a:p>
+            <a:pPr indent="0" marL="0">
+              <a:buNone/>
+            </a:pPr>
+            <a:r>
+              <a:rPr lang="en-US" sz="1250" dirty="0">
+                <a:solidFill>
+                  <a:srgbClr val="1E2235"/>
+                </a:solidFill>
+                <a:latin typeface="Microsoft JhengHei" pitchFamily="34" charset="0"/>
+                <a:ea typeface="Microsoft JhengHei" pitchFamily="34" charset="-122"/>
+                <a:cs typeface="Microsoft JhengHei" pitchFamily="34" charset="-120"/>
+              </a:rPr>
+              <a:t>OneDrive 中真實的文件、試算表、簡報</a:t>
+            </a:r>
+            <a:endParaRPr lang="en-US" sz="1250" dirty="0"/>
+          </a:p>
+        </p:txBody>
+      </p:sp>
+      <p:sp>
+        <p:nvSpPr>
+          <p:cNvPr id="35" name="Shape 33"/>
+          <p:cNvSpPr/>
+          <p:nvPr/>
+        </p:nvSpPr>
+        <p:spPr>
+          <a:xfrm>
+            <a:off x="640080" y="4937760"/>
+            <a:ext cx="10908792" cy="457200"/>
+          </a:xfrm>
+          <a:prstGeom prst="rect">
+            <a:avLst/>
+          </a:prstGeom>
+          <a:solidFill>
+            <a:srgbClr val="F2F4FB"/>
+          </a:solidFill>
+          <a:ln/>
+        </p:spPr>
+      </p:sp>
+      <p:sp>
+        <p:nvSpPr>
+          <p:cNvPr id="36" name="Text 34"/>
+          <p:cNvSpPr/>
+          <p:nvPr/>
+        </p:nvSpPr>
+        <p:spPr>
+          <a:xfrm>
+            <a:off x="822960" y="4937760"/>
+            <a:ext cx="2468880" cy="457200"/>
+          </a:xfrm>
+          <a:prstGeom prst="rect">
+            <a:avLst/>
+          </a:prstGeom>
+          <a:noFill/>
+          <a:ln/>
+        </p:spPr>
+        <p:txBody>
+          <a:bodyPr wrap="square" rtlCol="0" anchor="ctr"/>
+          <a:lstStyle/>
+          <a:p>
+            <a:pPr indent="0" marL="0">
+              <a:buNone/>
+            </a:pPr>
+            <a:r>
+              <a:rPr lang="en-US" sz="1250" b="1" dirty="0">
+                <a:solidFill>
+                  <a:srgbClr val="1E2235"/>
+                </a:solidFill>
+                <a:latin typeface="Microsoft JhengHei" pitchFamily="34" charset="0"/>
+                <a:ea typeface="Microsoft JhengHei" pitchFamily="34" charset="-122"/>
+                <a:cs typeface="Microsoft JhengHei" pitchFamily="34" charset="-120"/>
+              </a:rPr>
+              <a:t>自動啟動</a:t>
+            </a:r>
+            <a:endParaRPr lang="en-US" sz="1250" dirty="0"/>
+          </a:p>
+        </p:txBody>
+      </p:sp>
+      <p:sp>
+        <p:nvSpPr>
+          <p:cNvPr id="37" name="Text 35"/>
+          <p:cNvSpPr/>
+          <p:nvPr/>
+        </p:nvSpPr>
+        <p:spPr>
+          <a:xfrm>
+            <a:off x="3566160" y="4937760"/>
+            <a:ext cx="3657600" cy="457200"/>
+          </a:xfrm>
+          <a:prstGeom prst="rect">
+            <a:avLst/>
+          </a:prstGeom>
+          <a:noFill/>
+          <a:ln/>
+        </p:spPr>
+        <p:txBody>
+          <a:bodyPr wrap="square" rtlCol="0" anchor="ctr"/>
+          <a:lstStyle/>
+          <a:p>
+            <a:pPr indent="0" marL="0">
+              <a:buNone/>
+            </a:pPr>
+            <a:r>
+              <a:rPr lang="en-US" sz="1250" dirty="0">
+                <a:solidFill>
+                  <a:srgbClr val="5B6079"/>
+                </a:solidFill>
+                <a:latin typeface="Microsoft JhengHei" pitchFamily="34" charset="0"/>
+                <a:ea typeface="Microsoft JhengHei" pitchFamily="34" charset="-122"/>
+                <a:cs typeface="Microsoft JhengHei" pitchFamily="34" charset="-120"/>
+              </a:rPr>
+              <a:t>每次都要你開啟並下指令</a:t>
+            </a:r>
+            <a:endParaRPr lang="en-US" sz="1250" dirty="0"/>
+          </a:p>
+        </p:txBody>
+      </p:sp>
+      <p:sp>
+        <p:nvSpPr>
+          <p:cNvPr id="38" name="Text 36"/>
+          <p:cNvSpPr/>
+          <p:nvPr/>
+        </p:nvSpPr>
+        <p:spPr>
+          <a:xfrm>
+            <a:off x="7589520" y="4937760"/>
+            <a:ext cx="3776472" cy="457200"/>
+          </a:xfrm>
+          <a:prstGeom prst="rect">
+            <a:avLst/>
+          </a:prstGeom>
+          <a:noFill/>
+          <a:ln/>
+        </p:spPr>
+        <p:txBody>
+          <a:bodyPr wrap="square" rtlCol="0" anchor="ctr"/>
+          <a:lstStyle/>
+          <a:p>
+            <a:pPr indent="0" marL="0">
+              <a:buNone/>
+            </a:pPr>
+            <a:r>
+              <a:rPr lang="en-US" sz="1250" dirty="0">
+                <a:solidFill>
+                  <a:srgbClr val="1E2235"/>
+                </a:solidFill>
+                <a:latin typeface="Microsoft JhengHei" pitchFamily="34" charset="0"/>
+                <a:ea typeface="Microsoft JhengHei" pitchFamily="34" charset="-122"/>
+                <a:cs typeface="Microsoft JhengHei" pitchFamily="34" charset="-120"/>
+              </a:rPr>
+              <a:t>排程提示／事件觸發：收信或被 @提及時自動執行</a:t>
+            </a:r>
+            <a:endParaRPr lang="en-US" sz="1250" dirty="0"/>
+          </a:p>
+        </p:txBody>
+      </p:sp>
+      <p:sp>
+        <p:nvSpPr>
+          <p:cNvPr id="39" name="Shape 37"/>
+          <p:cNvSpPr/>
+          <p:nvPr/>
+        </p:nvSpPr>
+        <p:spPr>
+          <a:xfrm>
+            <a:off x="640080" y="5394960"/>
+            <a:ext cx="10908792" cy="457200"/>
+          </a:xfrm>
+          <a:prstGeom prst="rect">
+            <a:avLst/>
+          </a:prstGeom>
+          <a:solidFill>
+            <a:srgbClr val="FFFFFF"/>
+          </a:solidFill>
+          <a:ln/>
+        </p:spPr>
+      </p:sp>
+      <p:sp>
+        <p:nvSpPr>
+          <p:cNvPr id="40" name="Text 38"/>
+          <p:cNvSpPr/>
+          <p:nvPr/>
+        </p:nvSpPr>
+        <p:spPr>
+          <a:xfrm>
+            <a:off x="822960" y="5394960"/>
+            <a:ext cx="2468880" cy="457200"/>
+          </a:xfrm>
+          <a:prstGeom prst="rect">
+            <a:avLst/>
+          </a:prstGeom>
+          <a:noFill/>
+          <a:ln/>
+        </p:spPr>
+        <p:txBody>
+          <a:bodyPr wrap="square" rtlCol="0" anchor="ctr"/>
+          <a:lstStyle/>
+          <a:p>
+            <a:pPr indent="0" marL="0">
+              <a:buNone/>
+            </a:pPr>
+            <a:r>
+              <a:rPr lang="en-US" sz="1250" b="1" dirty="0">
+                <a:solidFill>
+                  <a:srgbClr val="1E2235"/>
+                </a:solidFill>
+                <a:latin typeface="Microsoft JhengHei" pitchFamily="34" charset="0"/>
+                <a:ea typeface="Microsoft JhengHei" pitchFamily="34" charset="-122"/>
+                <a:cs typeface="Microsoft JhengHei" pitchFamily="34" charset="-120"/>
+              </a:rPr>
+              <a:t>外部系統</a:t>
+            </a:r>
+            <a:endParaRPr lang="en-US" sz="1250" dirty="0"/>
+          </a:p>
+        </p:txBody>
+      </p:sp>
+      <p:sp>
+        <p:nvSpPr>
+          <p:cNvPr id="41" name="Text 39"/>
+          <p:cNvSpPr/>
+          <p:nvPr/>
+        </p:nvSpPr>
+        <p:spPr>
+          <a:xfrm>
+            <a:off x="3566160" y="5394960"/>
+            <a:ext cx="3657600" cy="457200"/>
+          </a:xfrm>
+          <a:prstGeom prst="rect">
+            <a:avLst/>
+          </a:prstGeom>
+          <a:noFill/>
+          <a:ln/>
+        </p:spPr>
+        <p:txBody>
+          <a:bodyPr wrap="square" rtlCol="0" anchor="ctr"/>
+          <a:lstStyle/>
+          <a:p>
+            <a:pPr indent="0" marL="0">
+              <a:buNone/>
+            </a:pPr>
+            <a:r>
+              <a:rPr lang="en-US" sz="1250" dirty="0">
+                <a:solidFill>
+                  <a:srgbClr val="5B6079"/>
+                </a:solidFill>
+                <a:latin typeface="Microsoft JhengHei" pitchFamily="34" charset="0"/>
+                <a:ea typeface="Microsoft JhengHei" pitchFamily="34" charset="-122"/>
+                <a:cs typeface="Microsoft JhengHei" pitchFamily="34" charset="-120"/>
+              </a:rPr>
+              <a:t>接地於 M365 資料</a:t>
+            </a:r>
+            <a:endParaRPr lang="en-US" sz="1250" dirty="0"/>
+          </a:p>
+        </p:txBody>
+      </p:sp>
+      <p:sp>
+        <p:nvSpPr>
+          <p:cNvPr id="42" name="Text 40"/>
+          <p:cNvSpPr/>
+          <p:nvPr/>
+        </p:nvSpPr>
+        <p:spPr>
+          <a:xfrm>
+            <a:off x="7589520" y="5394960"/>
+            <a:ext cx="3776472" cy="457200"/>
+          </a:xfrm>
+          <a:prstGeom prst="rect">
+            <a:avLst/>
+          </a:prstGeom>
+          <a:noFill/>
+          <a:ln/>
+        </p:spPr>
+        <p:txBody>
+          <a:bodyPr wrap="square" rtlCol="0" anchor="ctr"/>
+          <a:lstStyle/>
+          <a:p>
+            <a:pPr indent="0" marL="0">
+              <a:buNone/>
+            </a:pPr>
+            <a:r>
+              <a:rPr lang="en-US" sz="1250" dirty="0">
+                <a:solidFill>
+                  <a:srgbClr val="1E2235"/>
+                </a:solidFill>
+                <a:latin typeface="Microsoft JhengHei" pitchFamily="34" charset="0"/>
+                <a:ea typeface="Microsoft JhengHei" pitchFamily="34" charset="-122"/>
+                <a:cs typeface="Microsoft JhengHei" pitchFamily="34" charset="-120"/>
+              </a:rPr>
+              <a:t>可透過 Plugins／MCP 連 D365、SAP、Fabric 等</a:t>
+            </a:r>
+            <a:endParaRPr lang="en-US" sz="1250" dirty="0"/>
+          </a:p>
+        </p:txBody>
+      </p:sp>
+      <p:sp>
+        <p:nvSpPr>
+          <p:cNvPr id="43" name="Shape 41"/>
+          <p:cNvSpPr/>
+          <p:nvPr/>
+        </p:nvSpPr>
+        <p:spPr>
+          <a:xfrm>
+            <a:off x="640080" y="5852160"/>
+            <a:ext cx="10908792" cy="457200"/>
+          </a:xfrm>
+          <a:prstGeom prst="rect">
+            <a:avLst/>
+          </a:prstGeom>
+          <a:solidFill>
+            <a:srgbClr val="F2F4FB"/>
+          </a:solidFill>
+          <a:ln/>
+        </p:spPr>
+      </p:sp>
+      <p:sp>
+        <p:nvSpPr>
+          <p:cNvPr id="44" name="Text 42"/>
+          <p:cNvSpPr/>
+          <p:nvPr/>
+        </p:nvSpPr>
+        <p:spPr>
+          <a:xfrm>
+            <a:off x="822960" y="5852160"/>
+            <a:ext cx="2468880" cy="457200"/>
+          </a:xfrm>
+          <a:prstGeom prst="rect">
+            <a:avLst/>
+          </a:prstGeom>
+          <a:noFill/>
+          <a:ln/>
+        </p:spPr>
+        <p:txBody>
+          <a:bodyPr wrap="square" rtlCol="0" anchor="ctr"/>
+          <a:lstStyle/>
+          <a:p>
+            <a:pPr indent="0" marL="0">
+              <a:buNone/>
+            </a:pPr>
+            <a:r>
+              <a:rPr lang="en-US" sz="1250" b="1" dirty="0">
+                <a:solidFill>
+                  <a:srgbClr val="1E2235"/>
+                </a:solidFill>
+                <a:latin typeface="Microsoft JhengHei" pitchFamily="34" charset="0"/>
+                <a:ea typeface="Microsoft JhengHei" pitchFamily="34" charset="-122"/>
+                <a:cs typeface="Microsoft JhengHei" pitchFamily="34" charset="-120"/>
+              </a:rPr>
               <a:t>把關</a:t>
             </a:r>
-            <a:endParaRPr lang="en-US" sz="1400" dirty="0"/>
-          </a:p>
-        </p:txBody>
-      </p:sp>
-      <p:sp>
-        <p:nvSpPr>
-          <p:cNvPr id="29" name="Text 27"/>
-          <p:cNvSpPr/>
-          <p:nvPr/>
-        </p:nvSpPr>
-        <p:spPr>
-          <a:xfrm>
-            <a:off x="3566160" y="5760720"/>
-            <a:ext cx="3657600" cy="786384"/>
+            <a:endParaRPr lang="en-US" sz="1250" dirty="0"/>
+          </a:p>
+        </p:txBody>
+      </p:sp>
+      <p:sp>
+        <p:nvSpPr>
+          <p:cNvPr id="45" name="Text 43"/>
+          <p:cNvSpPr/>
+          <p:nvPr/>
+        </p:nvSpPr>
+        <p:spPr>
+          <a:xfrm>
+            <a:off x="3566160" y="5852160"/>
+            <a:ext cx="3657600" cy="457200"/>
           </a:xfrm>
           <a:prstGeom prst="rect">
             <a:avLst/>
@@ -21270,7 +21818,7 @@
               <a:buNone/>
             </a:pPr>
             <a:r>
-              <a:rPr lang="en-US" sz="1400" dirty="0">
+              <a:rPr lang="en-US" sz="1250" dirty="0">
                 <a:solidFill>
                   <a:srgbClr val="5B6079"/>
                 </a:solidFill>
@@ -21280,20 +21828,20 @@
               </a:rPr>
               <a:t>你自行判斷</a:t>
             </a:r>
-            <a:endParaRPr lang="en-US" sz="1400" dirty="0"/>
-          </a:p>
-        </p:txBody>
-      </p:sp>
-      <p:sp>
-        <p:nvSpPr>
-          <p:cNvPr id="30" name="Text 28"/>
-          <p:cNvSpPr/>
-          <p:nvPr/>
-        </p:nvSpPr>
-        <p:spPr>
-          <a:xfrm>
-            <a:off x="7589520" y="5760720"/>
-            <a:ext cx="3776472" cy="786384"/>
+            <a:endParaRPr lang="en-US" sz="1250" dirty="0"/>
+          </a:p>
+        </p:txBody>
+      </p:sp>
+      <p:sp>
+        <p:nvSpPr>
+          <p:cNvPr id="46" name="Text 44"/>
+          <p:cNvSpPr/>
+          <p:nvPr/>
+        </p:nvSpPr>
+        <p:spPr>
+          <a:xfrm>
+            <a:off x="7589520" y="5852160"/>
+            <a:ext cx="3776472" cy="457200"/>
           </a:xfrm>
           <a:prstGeom prst="rect">
             <a:avLst/>
@@ -21309,7 +21857,7 @@
               <a:buNone/>
             </a:pPr>
             <a:r>
-              <a:rPr lang="en-US" sz="1400" dirty="0">
+              <a:rPr lang="en-US" sz="1250" dirty="0">
                 <a:solidFill>
                   <a:srgbClr val="1E2235"/>
                 </a:solidFill>
@@ -21319,13 +21867,13 @@
               </a:rPr>
               <a:t>中高風險動作顯示風險等級，核准後才執行</a:t>
             </a:r>
-            <a:endParaRPr lang="en-US" sz="1400" dirty="0"/>
-          </a:p>
-        </p:txBody>
-      </p:sp>
-      <p:sp>
-        <p:nvSpPr>
-          <p:cNvPr id="31" name="Text 29"/>
+            <a:endParaRPr lang="en-US" sz="1250" dirty="0"/>
+          </a:p>
+        </p:txBody>
+      </p:sp>
+      <p:sp>
+        <p:nvSpPr>
+          <p:cNvPr id="47" name="Text 45"/>
           <p:cNvSpPr/>
           <p:nvPr/>
         </p:nvSpPr>
@@ -21364,7 +21912,7 @@
       </p:sp>
       <p:sp>
         <p:nvSpPr>
-          <p:cNvPr id="32" name="Text 30"/>
+          <p:cNvPr id="48" name="Text 46"/>
           <p:cNvSpPr/>
           <p:nvPr/>
         </p:nvSpPr>
@@ -21843,7 +22391,7 @@
                 <a:ea typeface="Microsoft JhengHei" pitchFamily="34" charset="-122"/>
                 <a:cs typeface="Microsoft JhengHei" pitchFamily="34" charset="-120"/>
               </a:rPr>
-              <a:t>右側面板同時呈現「參考」輸入檔、「輸出」產出檔與「技能」，過程透明可追。</a:t>
+              <a:t>右側面板同時呈現進度、輸入檔、輸出檔、已載入技能、排程與已核准權限，過程透明可追。</a:t>
             </a:r>
             <a:endParaRPr lang="en-US" sz="1300" dirty="0"/>
           </a:p>
@@ -22002,7 +22550,7 @@
                 <a:ea typeface="Microsoft JhengHei" pitchFamily="34" charset="-122"/>
                 <a:cs typeface="Microsoft JhengHei" pitchFamily="34" charset="-120"/>
               </a:rPr>
-              <a:t>中高風險動作顯示 RISK-LEVEL；可核准、取消，或設定 per-recipient／per-domain／always 的 don’t ask again。</a:t>
+              <a:t>中高風險動作顯示 RISK-LEVEL；可核准、取消，或設定 per-recipient／per-domain／always 的 don’t ask again；多筆待審可「Approve All」。</a:t>
             </a:r>
             <a:endParaRPr lang="en-US" sz="1300" dirty="0"/>
           </a:p>
@@ -22161,7 +22709,7 @@
                 <a:ea typeface="Microsoft JhengHei" pitchFamily="34" charset="-122"/>
                 <a:cs typeface="Microsoft JhengHei" pitchFamily="34" charset="-120"/>
               </a:rPr>
-              <a:t>本機 Edge 瀏覽器（預覽・僅限網頁版）、Imagen 2 影像生成、模型選擇器新增 Sonnet+Opus 顧問配對、排程提示／事件驅動任務（信件或 @提及自動觸發）、Download-All zip（50 檔／500MB）。</a:t>
+              <a:t>本機 Edge 瀏覽器（預設停用，需管理員開啟＋Edge 150 以上）、ChatGPT Images 2.0 影像生成、品牌範本自動套用簡報、Plugins／MCP 連外部系統、排程與事件觸發任務。</a:t>
             </a:r>
             <a:endParaRPr lang="en-US" sz="1300" dirty="0"/>
           </a:p>
